--- a/docs/presentaciones/parts/parte-6-sistemas-de-recomendacion-completa.pptx
+++ b/docs/presentaciones/parts/parte-6-sistemas-de-recomendacion-completa.pptx
@@ -3947,7 +3947,7 @@
                 </a:solidFill>
                 <a:latin typeface="Segoe UI"/>
               </a:rPr>
-              <a:t>Requiere: pip install scipy scikit-learn implicit. Sobre dataset sintético similar a MovieLens 100K.</a:t>
+              <a:t>**Factorizar una matriz es descomponer la tabla usuario × item en dos matrices más chicas de "gustos latentes".** Imaginá la tabla gigante de quién calificó qué (llena de huecos). La factorización dice: cada usuario se resume en un vector de pocos números —cuánto le gustan</a:t>
             </a:r>
           </a:p>
         </p:txBody>
@@ -5314,7 +5314,7 @@
                 </a:solidFill>
                 <a:latin typeface="Segoe UI"/>
               </a:rPr>
-              <a:t>Parte: 6 — Sistemas de Recomendación · Fuente: Aggarwal Recommender Systems: The Textbook cap. 4 + docs scikit-learn TfidfVectorizer.  Duración estimada: 70 min.</a:t>
+              <a:t>Parte: 6 — Sistemas de Recomendación · Fuente: Aggarwal Recommender Systems: The Textbook cap. 4 + docs scikit-learn TfidfVectorizer.  Duración estimada: 70 min. · Nivel: Intermedio-Avanzado</a:t>
             </a:r>
           </a:p>
         </p:txBody>
@@ -7728,7 +7728,7 @@
                 </a:solidFill>
                 <a:latin typeface="Segoe UI"/>
               </a:rPr>
-              <a:t>Parte: 6 — Sistemas de Recomendación · Fuente: Burke, Hybrid Recommender Systems: Survey and Experiments (UMUAI 2002) + Kula, Metadata Embeddings for User and Item Cold-start Recommendations (LightFM, 2015).  Duración estimada: 75 min.</a:t>
+              <a:t>Parte: 6 — Sistemas de Recomendación · Fuente: Burke, Hybrid Recommender Systems: Survey and Experiments (UMUAI 2002) + Kula, Metadata Embeddings for User and Item Cold-start Recommendations (LightFM, 2015).  Duración estimada: 75 min. · Nivel: Intermedio-Avanzado</a:t>
             </a:r>
           </a:p>
         </p:txBody>
@@ -10465,7 +10465,7 @@
                 </a:solidFill>
                 <a:latin typeface="Segoe UI"/>
               </a:rPr>
-              <a:t>Parte: 6 — Sistemas de Recomendación · Fuente: Aggarwal cap. 7 + Järvelin &amp; Kekäläinen, Cumulated Gain-Based Evaluation of IR Techniques (TOIS 2002 — NDCG paper).  Duración estimada: 70 min.</a:t>
+              <a:t>Parte: 6 — Sistemas de Recomendación · Fuente: Aggarwal cap. 7 + Järvelin &amp; Kekäläinen, Cumulated Gain-Based Evaluation of IR Techniques (TOIS 2002 — NDCG paper).  Duración estimada: 70 min. · Nivel: Intermedio-Avanzado</a:t>
             </a:r>
           </a:p>
         </p:txBody>
@@ -12879,7 +12879,7 @@
                 </a:solidFill>
                 <a:latin typeface="Segoe UI"/>
               </a:rPr>
-              <a:t>Parte: 6 — Sistemas de Recomendación · Fuente: Schein, Popescul, Ungar, Pennock, Methods and Metrics for Cold-Start Recommendations (SIGIR 2002) + Aggarwal cap. 13.  Duración estimada: 70 min.</a:t>
+              <a:t>Parte: 6 — Sistemas de Recomendación · Fuente: Schein, Popescul, Ungar, Pennock, Methods and Metrics for Cold-Start Recommendations (SIGIR 2002) + Aggarwal cap. 13.  Duración estimada: 70 min. · Nivel: Intermedio-Avanzado</a:t>
             </a:r>
           </a:p>
         </p:txBody>
@@ -15296,7 +15296,7 @@
                 </a:solidFill>
                 <a:latin typeface="Segoe UI"/>
               </a:rPr>
-              <a:t>Parte: 6 — Sistemas de Recomendación · Fuente: docs oficiales Surprise + LightFM + Implicit + TensorFlow Recommenders.  Duración estimada: 70 min.</a:t>
+              <a:t>Parte: 6 — Sistemas de Recomendación · Fuente: docs oficiales Surprise + LightFM + Implicit + TensorFlow Recommenders.  Duración estimada: 70 min. · Nivel: Intermedio-Avanzado</a:t>
             </a:r>
           </a:p>
         </p:txBody>
@@ -17842,7 +17842,7 @@
                 </a:solidFill>
                 <a:latin typeface="Segoe UI"/>
               </a:rPr>
-              <a:t>Parte: 6 — Sistemas de Recomendación · Fuente: Aggarwal, Recommender Systems: The Textbook (Springer, 2016) cap. 2 + Linden, Smith, York (Amazon, 2003) Item-to-Item Collaborative Filtering.  Duración estimada: 75 min.</a:t>
+              <a:t>Parte: 6 — Sistemas de Recomendación · Fuente: Aggarwal, Recommender Systems: The Textbook (Springer, 2016) cap. 2 + Linden, Smith, York (Amazon, 2003) Item-to-Item Collaborative Filtering.  Duración estimada: 75 min. · Nivel: Intermedio-Avanzado</a:t>
             </a:r>
           </a:p>
         </p:txBody>
@@ -20218,7 +20218,7 @@
                 </a:solidFill>
                 <a:latin typeface="Segoe UI"/>
               </a:rPr>
-              <a:t>Parte: 6 — Sistemas de Recomendación · Fuente: Koren, Bell, Volinsky Matrix Factorization Techniques for Recommender Systems (IEEE Computer, 2009) + Hu, Koren, Volinsky Collaborative Filtering for Implicit Feedback Datasets (ICDM 2008).  Duración estimada: 80 min.</a:t>
+              <a:t>Parte: 6 — Sistemas de Recomendación · Fuente: Koren, Bell, Volinsky Matrix Factorization Techniques for Recommender Systems (IEEE Computer, 2009) + Hu, Koren, Volinsky Collaborative Filtering for Implicit Feedback Datasets (ICDM 2008).  Duración estimada: 80 min. · Nivel: Intermedio-Avanzado</a:t>
             </a:r>
           </a:p>
         </p:txBody>
